--- a/docs/pptx/carbo/ritu-carbo-adjcif-grade2.pptx
+++ b/docs/pptx/carbo/ritu-carbo-adjcif-grade2.pptx
@@ -2271,7 +2271,7 @@
           </p:nvSpPr>
           <p:spPr>
             <a:xfrm>
-              <a:off x="910695" y="5085446"/>
+              <a:off x="910695" y="5076940"/>
               <a:ext cx="7706515" cy="0"/>
             </a:xfrm>
             <a:custGeom>
@@ -2314,7 +2314,7 @@
           </p:nvSpPr>
           <p:spPr>
             <a:xfrm>
-              <a:off x="910695" y="4095495"/>
+              <a:off x="910695" y="4069978"/>
               <a:ext cx="7706515" cy="0"/>
             </a:xfrm>
             <a:custGeom>
@@ -2357,7 +2357,7 @@
           </p:nvSpPr>
           <p:spPr>
             <a:xfrm>
-              <a:off x="910695" y="3105543"/>
+              <a:off x="910695" y="3063015"/>
               <a:ext cx="7706515" cy="0"/>
             </a:xfrm>
             <a:custGeom>
@@ -2615,7 +2615,7 @@
           </p:nvSpPr>
           <p:spPr>
             <a:xfrm>
-              <a:off x="910695" y="4590470"/>
+              <a:off x="910695" y="4573459"/>
               <a:ext cx="7706515" cy="0"/>
             </a:xfrm>
             <a:custGeom>
@@ -2658,7 +2658,7 @@
           </p:nvSpPr>
           <p:spPr>
             <a:xfrm>
-              <a:off x="910695" y="3600519"/>
+              <a:off x="910695" y="3566496"/>
               <a:ext cx="7706515" cy="0"/>
             </a:xfrm>
             <a:custGeom>
@@ -2701,21 +2701,21 @@
           </p:nvSpPr>
           <p:spPr>
             <a:xfrm>
-              <a:off x="910695" y="2610567"/>
-              <a:ext cx="7706515" cy="0"/>
+              <a:off x="2857277" y="2583293"/>
+              <a:ext cx="0" cy="3139848"/>
             </a:xfrm>
             <a:custGeom>
               <a:avLst/>
               <a:pathLst>
-                <a:path w="7706515" h="0">
+                <a:path w="0" h="3139848">
                   <a:moveTo>
+                    <a:pt x="0" y="3139848"/>
+                  </a:moveTo>
+                  <a:lnTo>
                     <a:pt x="0" y="0"/>
-                  </a:moveTo>
-                  <a:lnTo>
-                    <a:pt x="7706515" y="0"/>
-                  </a:lnTo>
-                  <a:lnTo>
-                    <a:pt x="7706515" y="0"/>
+                  </a:lnTo>
+                  <a:lnTo>
+                    <a:pt x="0" y="0"/>
                   </a:lnTo>
                 </a:path>
               </a:pathLst>
@@ -2744,7 +2744,7 @@
           </p:nvSpPr>
           <p:spPr>
             <a:xfrm>
-              <a:off x="2857277" y="2583293"/>
+              <a:off x="5074342" y="2583293"/>
               <a:ext cx="0" cy="3139848"/>
             </a:xfrm>
             <a:custGeom>
@@ -2787,7 +2787,7 @@
           </p:nvSpPr>
           <p:spPr>
             <a:xfrm>
-              <a:off x="5074342" y="2583293"/>
+              <a:off x="7291406" y="2583293"/>
               <a:ext cx="0" cy="3139848"/>
             </a:xfrm>
             <a:custGeom>
@@ -2830,28 +2830,280 @@
           </p:nvSpPr>
           <p:spPr>
             <a:xfrm>
-              <a:off x="7291406" y="2583293"/>
-              <a:ext cx="0" cy="3139848"/>
+              <a:off x="1260991" y="3635302"/>
+              <a:ext cx="7005923" cy="1922034"/>
             </a:xfrm>
             <a:custGeom>
               <a:avLst/>
               <a:pathLst>
-                <a:path w="0" h="3139848">
+                <a:path w="7005923" h="1922034">
                   <a:moveTo>
-                    <a:pt x="0" y="3139848"/>
+                    <a:pt x="0" y="1922034"/>
                   </a:moveTo>
                   <a:lnTo>
-                    <a:pt x="0" y="0"/>
-                  </a:lnTo>
-                  <a:lnTo>
-                    <a:pt x="0" y="0"/>
+                    <a:pt x="88682" y="1922034"/>
+                  </a:lnTo>
+                  <a:lnTo>
+                    <a:pt x="88682" y="1875154"/>
+                  </a:lnTo>
+                  <a:lnTo>
+                    <a:pt x="177365" y="1875154"/>
+                  </a:lnTo>
+                  <a:lnTo>
+                    <a:pt x="177365" y="1851867"/>
+                  </a:lnTo>
+                  <a:lnTo>
+                    <a:pt x="354730" y="1851867"/>
+                  </a:lnTo>
+                  <a:lnTo>
+                    <a:pt x="354730" y="1828451"/>
+                  </a:lnTo>
+                  <a:lnTo>
+                    <a:pt x="443412" y="1828451"/>
+                  </a:lnTo>
+                  <a:lnTo>
+                    <a:pt x="443412" y="1805131"/>
+                  </a:lnTo>
+                  <a:lnTo>
+                    <a:pt x="620778" y="1805131"/>
+                  </a:lnTo>
+                  <a:lnTo>
+                    <a:pt x="620778" y="1736257"/>
+                  </a:lnTo>
+                  <a:lnTo>
+                    <a:pt x="709460" y="1736257"/>
+                  </a:lnTo>
+                  <a:lnTo>
+                    <a:pt x="709460" y="1713036"/>
+                  </a:lnTo>
+                  <a:lnTo>
+                    <a:pt x="798143" y="1713036"/>
+                  </a:lnTo>
+                  <a:lnTo>
+                    <a:pt x="798143" y="1689761"/>
+                  </a:lnTo>
+                  <a:lnTo>
+                    <a:pt x="975508" y="1689761"/>
+                  </a:lnTo>
+                  <a:lnTo>
+                    <a:pt x="975508" y="1666444"/>
+                  </a:lnTo>
+                  <a:lnTo>
+                    <a:pt x="1152873" y="1666444"/>
+                  </a:lnTo>
+                  <a:lnTo>
+                    <a:pt x="1152873" y="1620421"/>
+                  </a:lnTo>
+                  <a:lnTo>
+                    <a:pt x="1241556" y="1620421"/>
+                  </a:lnTo>
+                  <a:lnTo>
+                    <a:pt x="1241556" y="1529442"/>
+                  </a:lnTo>
+                  <a:lnTo>
+                    <a:pt x="1330238" y="1529442"/>
+                  </a:lnTo>
+                  <a:lnTo>
+                    <a:pt x="1330238" y="1505866"/>
+                  </a:lnTo>
+                  <a:lnTo>
+                    <a:pt x="1862334" y="1505866"/>
+                  </a:lnTo>
+                  <a:lnTo>
+                    <a:pt x="1862334" y="1436396"/>
+                  </a:lnTo>
+                  <a:lnTo>
+                    <a:pt x="2039699" y="1436396"/>
+                  </a:lnTo>
+                  <a:lnTo>
+                    <a:pt x="2039699" y="1411223"/>
+                  </a:lnTo>
+                  <a:lnTo>
+                    <a:pt x="2128381" y="1411223"/>
+                  </a:lnTo>
+                  <a:lnTo>
+                    <a:pt x="2128381" y="1386328"/>
+                  </a:lnTo>
+                  <a:lnTo>
+                    <a:pt x="2217064" y="1386328"/>
+                  </a:lnTo>
+                  <a:lnTo>
+                    <a:pt x="2217064" y="1361466"/>
+                  </a:lnTo>
+                  <a:lnTo>
+                    <a:pt x="2394429" y="1361466"/>
+                  </a:lnTo>
+                  <a:lnTo>
+                    <a:pt x="2394429" y="1336638"/>
+                  </a:lnTo>
+                  <a:lnTo>
+                    <a:pt x="2483112" y="1336638"/>
+                  </a:lnTo>
+                  <a:lnTo>
+                    <a:pt x="2483112" y="1239600"/>
+                  </a:lnTo>
+                  <a:lnTo>
+                    <a:pt x="3103890" y="1239600"/>
+                  </a:lnTo>
+                  <a:lnTo>
+                    <a:pt x="3103890" y="1053417"/>
+                  </a:lnTo>
+                  <a:lnTo>
+                    <a:pt x="3192572" y="1053417"/>
+                  </a:lnTo>
+                  <a:lnTo>
+                    <a:pt x="3192572" y="1006614"/>
+                  </a:lnTo>
+                  <a:lnTo>
+                    <a:pt x="3281255" y="1006614"/>
+                  </a:lnTo>
+                  <a:lnTo>
+                    <a:pt x="3281255" y="982694"/>
+                  </a:lnTo>
+                  <a:lnTo>
+                    <a:pt x="3369937" y="982694"/>
+                  </a:lnTo>
+                  <a:lnTo>
+                    <a:pt x="3369937" y="958914"/>
+                  </a:lnTo>
+                  <a:lnTo>
+                    <a:pt x="3458620" y="958914"/>
+                  </a:lnTo>
+                  <a:lnTo>
+                    <a:pt x="3458620" y="935267"/>
+                  </a:lnTo>
+                  <a:lnTo>
+                    <a:pt x="3547302" y="935267"/>
+                  </a:lnTo>
+                  <a:lnTo>
+                    <a:pt x="3547302" y="888312"/>
+                  </a:lnTo>
+                  <a:lnTo>
+                    <a:pt x="3724668" y="888312"/>
+                  </a:lnTo>
+                  <a:lnTo>
+                    <a:pt x="3724668" y="864331"/>
+                  </a:lnTo>
+                  <a:lnTo>
+                    <a:pt x="3813350" y="864331"/>
+                  </a:lnTo>
+                  <a:lnTo>
+                    <a:pt x="3813350" y="839342"/>
+                  </a:lnTo>
+                  <a:lnTo>
+                    <a:pt x="3990715" y="839342"/>
+                  </a:lnTo>
+                  <a:lnTo>
+                    <a:pt x="3990715" y="763836"/>
+                  </a:lnTo>
+                  <a:lnTo>
+                    <a:pt x="4611493" y="763836"/>
+                  </a:lnTo>
+                  <a:lnTo>
+                    <a:pt x="4611493" y="738356"/>
+                  </a:lnTo>
+                  <a:lnTo>
+                    <a:pt x="4700176" y="738356"/>
+                  </a:lnTo>
+                  <a:lnTo>
+                    <a:pt x="4700176" y="687687"/>
+                  </a:lnTo>
+                  <a:lnTo>
+                    <a:pt x="4788859" y="687687"/>
+                  </a:lnTo>
+                  <a:lnTo>
+                    <a:pt x="4788859" y="662527"/>
+                  </a:lnTo>
+                  <a:lnTo>
+                    <a:pt x="4966224" y="662527"/>
+                  </a:lnTo>
+                  <a:lnTo>
+                    <a:pt x="4966224" y="584143"/>
+                  </a:lnTo>
+                  <a:lnTo>
+                    <a:pt x="5143589" y="584143"/>
+                  </a:lnTo>
+                  <a:lnTo>
+                    <a:pt x="5143589" y="557841"/>
+                  </a:lnTo>
+                  <a:lnTo>
+                    <a:pt x="5587002" y="557841"/>
+                  </a:lnTo>
+                  <a:lnTo>
+                    <a:pt x="5587002" y="531708"/>
+                  </a:lnTo>
+                  <a:lnTo>
+                    <a:pt x="5764367" y="531708"/>
+                  </a:lnTo>
+                  <a:lnTo>
+                    <a:pt x="5764367" y="505677"/>
+                  </a:lnTo>
+                  <a:lnTo>
+                    <a:pt x="5941732" y="505677"/>
+                  </a:lnTo>
+                  <a:lnTo>
+                    <a:pt x="5941732" y="479900"/>
+                  </a:lnTo>
+                  <a:lnTo>
+                    <a:pt x="6030415" y="479900"/>
+                  </a:lnTo>
+                  <a:lnTo>
+                    <a:pt x="6030415" y="454281"/>
+                  </a:lnTo>
+                  <a:lnTo>
+                    <a:pt x="6119097" y="454281"/>
+                  </a:lnTo>
+                  <a:lnTo>
+                    <a:pt x="6119097" y="403265"/>
+                  </a:lnTo>
+                  <a:lnTo>
+                    <a:pt x="6207780" y="403265"/>
+                  </a:lnTo>
+                  <a:lnTo>
+                    <a:pt x="6207780" y="352748"/>
+                  </a:lnTo>
+                  <a:lnTo>
+                    <a:pt x="6473827" y="352748"/>
+                  </a:lnTo>
+                  <a:lnTo>
+                    <a:pt x="6473827" y="326998"/>
+                  </a:lnTo>
+                  <a:lnTo>
+                    <a:pt x="6562510" y="326998"/>
+                  </a:lnTo>
+                  <a:lnTo>
+                    <a:pt x="6562510" y="275467"/>
+                  </a:lnTo>
+                  <a:lnTo>
+                    <a:pt x="6651193" y="275467"/>
+                  </a:lnTo>
+                  <a:lnTo>
+                    <a:pt x="6651193" y="224546"/>
+                  </a:lnTo>
+                  <a:lnTo>
+                    <a:pt x="6739875" y="224546"/>
+                  </a:lnTo>
+                  <a:lnTo>
+                    <a:pt x="6739875" y="173893"/>
+                  </a:lnTo>
+                  <a:lnTo>
+                    <a:pt x="6828558" y="173893"/>
+                  </a:lnTo>
+                  <a:lnTo>
+                    <a:pt x="6828558" y="50900"/>
+                  </a:lnTo>
+                  <a:lnTo>
+                    <a:pt x="7005923" y="50900"/>
+                  </a:lnTo>
+                  <a:lnTo>
+                    <a:pt x="7005923" y="0"/>
                   </a:lnTo>
                 </a:path>
               </a:pathLst>
             </a:custGeom>
-            <a:ln w="13550" cap="flat">
+            <a:ln w="27101" cap="flat">
               <a:solidFill>
-                <a:srgbClr val="EBEBEB">
+                <a:srgbClr val="1F78B4">
                   <a:alpha val="100000"/>
                 </a:srgbClr>
               </a:solidFill>
@@ -2873,565 +3125,270 @@
           </p:nvSpPr>
           <p:spPr>
             <a:xfrm>
-              <a:off x="1260991" y="3666928"/>
-              <a:ext cx="7005923" cy="1891204"/>
+              <a:off x="1260991" y="2861938"/>
+              <a:ext cx="7005923" cy="2678065"/>
             </a:xfrm>
             <a:custGeom>
               <a:avLst/>
               <a:pathLst>
-                <a:path w="7005923" h="1891204">
+                <a:path w="7005923" h="2678065">
                   <a:moveTo>
-                    <a:pt x="0" y="1891204"/>
+                    <a:pt x="0" y="2678065"/>
                   </a:moveTo>
                   <a:lnTo>
-                    <a:pt x="88682" y="1891204"/>
-                  </a:lnTo>
-                  <a:lnTo>
-                    <a:pt x="88682" y="1845928"/>
-                  </a:lnTo>
-                  <a:lnTo>
-                    <a:pt x="177365" y="1845928"/>
-                  </a:lnTo>
-                  <a:lnTo>
-                    <a:pt x="177365" y="1823458"/>
-                  </a:lnTo>
-                  <a:lnTo>
-                    <a:pt x="354730" y="1823458"/>
-                  </a:lnTo>
-                  <a:lnTo>
-                    <a:pt x="354730" y="1800854"/>
-                  </a:lnTo>
-                  <a:lnTo>
-                    <a:pt x="443412" y="1800854"/>
-                  </a:lnTo>
-                  <a:lnTo>
-                    <a:pt x="443412" y="1778340"/>
-                  </a:lnTo>
-                  <a:lnTo>
-                    <a:pt x="620778" y="1778340"/>
-                  </a:lnTo>
-                  <a:lnTo>
-                    <a:pt x="620778" y="1711879"/>
-                  </a:lnTo>
-                  <a:lnTo>
-                    <a:pt x="709460" y="1711879"/>
-                  </a:lnTo>
-                  <a:lnTo>
-                    <a:pt x="709460" y="1689445"/>
-                  </a:lnTo>
-                  <a:lnTo>
-                    <a:pt x="798143" y="1689445"/>
-                  </a:lnTo>
-                  <a:lnTo>
-                    <a:pt x="798143" y="1666982"/>
-                  </a:lnTo>
-                  <a:lnTo>
-                    <a:pt x="975508" y="1666982"/>
-                  </a:lnTo>
-                  <a:lnTo>
-                    <a:pt x="975508" y="1644483"/>
-                  </a:lnTo>
-                  <a:lnTo>
-                    <a:pt x="1152873" y="1644483"/>
-                  </a:lnTo>
-                  <a:lnTo>
-                    <a:pt x="1152873" y="1600089"/>
-                  </a:lnTo>
-                  <a:lnTo>
-                    <a:pt x="1241556" y="1600089"/>
-                  </a:lnTo>
-                  <a:lnTo>
-                    <a:pt x="1241556" y="1512500"/>
-                  </a:lnTo>
-                  <a:lnTo>
-                    <a:pt x="1330238" y="1512500"/>
-                  </a:lnTo>
-                  <a:lnTo>
-                    <a:pt x="1330238" y="1489753"/>
-                  </a:lnTo>
-                  <a:lnTo>
-                    <a:pt x="1862334" y="1489753"/>
-                  </a:lnTo>
-                  <a:lnTo>
-                    <a:pt x="1862334" y="1422702"/>
-                  </a:lnTo>
-                  <a:lnTo>
-                    <a:pt x="2039699" y="1422702"/>
-                  </a:lnTo>
-                  <a:lnTo>
-                    <a:pt x="2039699" y="1398214"/>
-                  </a:lnTo>
-                  <a:lnTo>
-                    <a:pt x="2128381" y="1398214"/>
-                  </a:lnTo>
-                  <a:lnTo>
-                    <a:pt x="2128381" y="1373997"/>
-                  </a:lnTo>
-                  <a:lnTo>
-                    <a:pt x="2217064" y="1373997"/>
-                  </a:lnTo>
-                  <a:lnTo>
-                    <a:pt x="2217064" y="1349819"/>
-                  </a:lnTo>
-                  <a:lnTo>
-                    <a:pt x="2394429" y="1349819"/>
-                  </a:lnTo>
-                  <a:lnTo>
-                    <a:pt x="2394429" y="1325680"/>
-                  </a:lnTo>
-                  <a:lnTo>
-                    <a:pt x="2483112" y="1325680"/>
-                  </a:lnTo>
-                  <a:lnTo>
-                    <a:pt x="2483112" y="1208402"/>
-                  </a:lnTo>
-                  <a:lnTo>
-                    <a:pt x="3103890" y="1208402"/>
-                  </a:lnTo>
-                  <a:lnTo>
-                    <a:pt x="3103890" y="1026639"/>
-                  </a:lnTo>
-                  <a:lnTo>
-                    <a:pt x="3192572" y="1026639"/>
-                  </a:lnTo>
-                  <a:lnTo>
-                    <a:pt x="3192572" y="981093"/>
-                  </a:lnTo>
-                  <a:lnTo>
-                    <a:pt x="3281255" y="981093"/>
-                  </a:lnTo>
-                  <a:lnTo>
-                    <a:pt x="3281255" y="957877"/>
-                  </a:lnTo>
-                  <a:lnTo>
-                    <a:pt x="3369937" y="957877"/>
-                  </a:lnTo>
-                  <a:lnTo>
-                    <a:pt x="3369937" y="934790"/>
-                  </a:lnTo>
-                  <a:lnTo>
-                    <a:pt x="3458620" y="934790"/>
-                  </a:lnTo>
-                  <a:lnTo>
-                    <a:pt x="3458620" y="911828"/>
-                  </a:lnTo>
-                  <a:lnTo>
-                    <a:pt x="3547302" y="911828"/>
-                  </a:lnTo>
-                  <a:lnTo>
-                    <a:pt x="3547302" y="866205"/>
-                  </a:lnTo>
-                  <a:lnTo>
-                    <a:pt x="3724668" y="866205"/>
-                  </a:lnTo>
-                  <a:lnTo>
-                    <a:pt x="3724668" y="842891"/>
-                  </a:lnTo>
-                  <a:lnTo>
-                    <a:pt x="3813350" y="842891"/>
-                  </a:lnTo>
-                  <a:lnTo>
-                    <a:pt x="3813350" y="818616"/>
-                  </a:lnTo>
-                  <a:lnTo>
-                    <a:pt x="3990715" y="818616"/>
-                  </a:lnTo>
-                  <a:lnTo>
-                    <a:pt x="3990715" y="745185"/>
-                  </a:lnTo>
-                  <a:lnTo>
-                    <a:pt x="4611493" y="745185"/>
-                  </a:lnTo>
-                  <a:lnTo>
-                    <a:pt x="4611493" y="720372"/>
-                  </a:lnTo>
-                  <a:lnTo>
-                    <a:pt x="4700176" y="720372"/>
-                  </a:lnTo>
-                  <a:lnTo>
-                    <a:pt x="4700176" y="670900"/>
-                  </a:lnTo>
-                  <a:lnTo>
-                    <a:pt x="4788859" y="670900"/>
-                  </a:lnTo>
-                  <a:lnTo>
-                    <a:pt x="4788859" y="646350"/>
-                  </a:lnTo>
-                  <a:lnTo>
-                    <a:pt x="4966224" y="646350"/>
-                  </a:lnTo>
-                  <a:lnTo>
-                    <a:pt x="4966224" y="569856"/>
-                  </a:lnTo>
-                  <a:lnTo>
-                    <a:pt x="5143589" y="569856"/>
-                  </a:lnTo>
-                  <a:lnTo>
-                    <a:pt x="5143589" y="544218"/>
-                  </a:lnTo>
-                  <a:lnTo>
-                    <a:pt x="5587002" y="544218"/>
-                  </a:lnTo>
-                  <a:lnTo>
-                    <a:pt x="5587002" y="518745"/>
-                  </a:lnTo>
-                  <a:lnTo>
-                    <a:pt x="5764367" y="518745"/>
-                  </a:lnTo>
-                  <a:lnTo>
-                    <a:pt x="5764367" y="493352"/>
-                  </a:lnTo>
-                  <a:lnTo>
-                    <a:pt x="5941732" y="493352"/>
-                  </a:lnTo>
-                  <a:lnTo>
-                    <a:pt x="5941732" y="468210"/>
-                  </a:lnTo>
-                  <a:lnTo>
-                    <a:pt x="6030415" y="468210"/>
-                  </a:lnTo>
-                  <a:lnTo>
-                    <a:pt x="6030415" y="443212"/>
-                  </a:lnTo>
-                  <a:lnTo>
-                    <a:pt x="6119097" y="443212"/>
-                  </a:lnTo>
-                  <a:lnTo>
-                    <a:pt x="6119097" y="393450"/>
-                  </a:lnTo>
-                  <a:lnTo>
-                    <a:pt x="6207780" y="393450"/>
-                  </a:lnTo>
-                  <a:lnTo>
-                    <a:pt x="6207780" y="344152"/>
-                  </a:lnTo>
-                  <a:lnTo>
-                    <a:pt x="6473827" y="344152"/>
-                  </a:lnTo>
-                  <a:lnTo>
-                    <a:pt x="6473827" y="319031"/>
-                  </a:lnTo>
-                  <a:lnTo>
-                    <a:pt x="6562510" y="319031"/>
-                  </a:lnTo>
-                  <a:lnTo>
-                    <a:pt x="6562510" y="268783"/>
-                  </a:lnTo>
-                  <a:lnTo>
-                    <a:pt x="6651193" y="268783"/>
-                  </a:lnTo>
-                  <a:lnTo>
-                    <a:pt x="6651193" y="219123"/>
-                  </a:lnTo>
-                  <a:lnTo>
-                    <a:pt x="6739875" y="219123"/>
-                  </a:lnTo>
-                  <a:lnTo>
-                    <a:pt x="6739875" y="169722"/>
-                  </a:lnTo>
-                  <a:lnTo>
-                    <a:pt x="6828558" y="169722"/>
-                  </a:lnTo>
-                  <a:lnTo>
-                    <a:pt x="6828558" y="49660"/>
-                  </a:lnTo>
-                  <a:lnTo>
-                    <a:pt x="7005923" y="49660"/>
-                  </a:lnTo>
-                  <a:lnTo>
-                    <a:pt x="7005923" y="0"/>
-                  </a:lnTo>
-                </a:path>
-              </a:pathLst>
-            </a:custGeom>
-            <a:ln w="27101" cap="flat">
-              <a:solidFill>
-                <a:srgbClr val="1F78B4">
-                  <a:alpha val="100000"/>
-                </a:srgbClr>
-              </a:solidFill>
-              <a:prstDash val="solid"/>
-              <a:round/>
-            </a:ln>
-          </p:spPr>
-          <p:txBody>
-            <a:bodyPr/>
-            <a:lstStyle/>
-            <a:p/>
-          </p:txBody>
-        </p:sp>
-        <p:sp>
-          <p:nvSpPr>
-            <p:cNvPr id="19" name="pl19"/>
-            <p:cNvSpPr/>
-            <p:nvPr/>
-          </p:nvSpPr>
-          <p:spPr>
-            <a:xfrm>
-              <a:off x="1260991" y="2861938"/>
-              <a:ext cx="7005923" cy="2678290"/>
-            </a:xfrm>
-            <a:custGeom>
-              <a:avLst/>
-              <a:pathLst>
-                <a:path w="7005923" h="2678290">
-                  <a:moveTo>
-                    <a:pt x="0" y="2678290"/>
-                  </a:moveTo>
-                  <a:lnTo>
-                    <a:pt x="88682" y="2678290"/>
-                  </a:lnTo>
-                  <a:lnTo>
-                    <a:pt x="88682" y="2597719"/>
-                  </a:lnTo>
-                  <a:lnTo>
-                    <a:pt x="177365" y="2597719"/>
-                  </a:lnTo>
-                  <a:lnTo>
-                    <a:pt x="177365" y="2558246"/>
-                  </a:lnTo>
-                  <a:lnTo>
-                    <a:pt x="354730" y="2558246"/>
-                  </a:lnTo>
-                  <a:lnTo>
-                    <a:pt x="354730" y="2518866"/>
-                  </a:lnTo>
-                  <a:lnTo>
-                    <a:pt x="443412" y="2518866"/>
-                  </a:lnTo>
-                  <a:lnTo>
-                    <a:pt x="443412" y="2479960"/>
-                  </a:lnTo>
-                  <a:lnTo>
-                    <a:pt x="620778" y="2479960"/>
-                  </a:lnTo>
-                  <a:lnTo>
-                    <a:pt x="620778" y="2366855"/>
-                  </a:lnTo>
-                  <a:lnTo>
-                    <a:pt x="709460" y="2366855"/>
-                  </a:lnTo>
-                  <a:lnTo>
-                    <a:pt x="709460" y="2329236"/>
-                  </a:lnTo>
-                  <a:lnTo>
-                    <a:pt x="798143" y="2329236"/>
-                  </a:lnTo>
-                  <a:lnTo>
-                    <a:pt x="798143" y="2291835"/>
-                  </a:lnTo>
-                  <a:lnTo>
-                    <a:pt x="975508" y="2291835"/>
-                  </a:lnTo>
-                  <a:lnTo>
-                    <a:pt x="975508" y="2254637"/>
-                  </a:lnTo>
-                  <a:lnTo>
-                    <a:pt x="1152873" y="2254637"/>
-                  </a:lnTo>
-                  <a:lnTo>
-                    <a:pt x="1152873" y="2181975"/>
-                  </a:lnTo>
-                  <a:lnTo>
-                    <a:pt x="1241556" y="2181975"/>
-                  </a:lnTo>
-                  <a:lnTo>
-                    <a:pt x="1241556" y="2041303"/>
-                  </a:lnTo>
-                  <a:lnTo>
-                    <a:pt x="1330238" y="2041303"/>
-                  </a:lnTo>
-                  <a:lnTo>
-                    <a:pt x="1330238" y="2005319"/>
-                  </a:lnTo>
-                  <a:lnTo>
-                    <a:pt x="1862334" y="2005319"/>
-                  </a:lnTo>
-                  <a:lnTo>
-                    <a:pt x="1862334" y="1900480"/>
-                  </a:lnTo>
-                  <a:lnTo>
-                    <a:pt x="2039699" y="1900480"/>
-                  </a:lnTo>
-                  <a:lnTo>
-                    <a:pt x="2039699" y="1862630"/>
-                  </a:lnTo>
-                  <a:lnTo>
-                    <a:pt x="2128381" y="1862630"/>
-                  </a:lnTo>
-                  <a:lnTo>
-                    <a:pt x="2128381" y="1825422"/>
-                  </a:lnTo>
-                  <a:lnTo>
-                    <a:pt x="2217064" y="1825422"/>
-                  </a:lnTo>
-                  <a:lnTo>
-                    <a:pt x="2217064" y="1788491"/>
-                  </a:lnTo>
-                  <a:lnTo>
-                    <a:pt x="2394429" y="1788491"/>
-                  </a:lnTo>
-                  <a:lnTo>
-                    <a:pt x="2394429" y="1751829"/>
-                  </a:lnTo>
-                  <a:lnTo>
-                    <a:pt x="2483112" y="1751829"/>
-                  </a:lnTo>
-                  <a:lnTo>
-                    <a:pt x="2483112" y="1576574"/>
-                  </a:lnTo>
-                  <a:lnTo>
-                    <a:pt x="3103890" y="1576574"/>
-                  </a:lnTo>
-                  <a:lnTo>
-                    <a:pt x="3103890" y="1313664"/>
-                  </a:lnTo>
-                  <a:lnTo>
-                    <a:pt x="3192572" y="1313664"/>
-                  </a:lnTo>
-                  <a:lnTo>
-                    <a:pt x="3192572" y="1249339"/>
-                  </a:lnTo>
-                  <a:lnTo>
-                    <a:pt x="3281255" y="1249339"/>
-                  </a:lnTo>
-                  <a:lnTo>
-                    <a:pt x="3281255" y="1216781"/>
-                  </a:lnTo>
-                  <a:lnTo>
-                    <a:pt x="3369937" y="1216781"/>
-                  </a:lnTo>
-                  <a:lnTo>
-                    <a:pt x="3369937" y="1184558"/>
-                  </a:lnTo>
-                  <a:lnTo>
-                    <a:pt x="3458620" y="1184558"/>
-                  </a:lnTo>
-                  <a:lnTo>
-                    <a:pt x="3458620" y="1152659"/>
-                  </a:lnTo>
-                  <a:lnTo>
-                    <a:pt x="3547302" y="1152659"/>
-                  </a:lnTo>
-                  <a:lnTo>
-                    <a:pt x="3547302" y="1089720"/>
-                  </a:lnTo>
-                  <a:lnTo>
-                    <a:pt x="3724668" y="1089720"/>
-                  </a:lnTo>
-                  <a:lnTo>
-                    <a:pt x="3724668" y="1057780"/>
-                  </a:lnTo>
-                  <a:lnTo>
-                    <a:pt x="3813350" y="1057780"/>
-                  </a:lnTo>
-                  <a:lnTo>
-                    <a:pt x="3813350" y="1024685"/>
-                  </a:lnTo>
-                  <a:lnTo>
-                    <a:pt x="3990715" y="1024685"/>
-                  </a:lnTo>
-                  <a:lnTo>
-                    <a:pt x="3990715" y="925552"/>
-                  </a:lnTo>
-                  <a:lnTo>
-                    <a:pt x="4611493" y="925552"/>
-                  </a:lnTo>
-                  <a:lnTo>
-                    <a:pt x="4611493" y="892386"/>
-                  </a:lnTo>
-                  <a:lnTo>
-                    <a:pt x="4700176" y="892386"/>
-                  </a:lnTo>
-                  <a:lnTo>
-                    <a:pt x="4700176" y="826753"/>
-                  </a:lnTo>
-                  <a:lnTo>
-                    <a:pt x="4788859" y="826753"/>
-                  </a:lnTo>
-                  <a:lnTo>
-                    <a:pt x="4788859" y="794427"/>
-                  </a:lnTo>
-                  <a:lnTo>
-                    <a:pt x="4966224" y="794427"/>
-                  </a:lnTo>
-                  <a:lnTo>
-                    <a:pt x="4966224" y="694730"/>
-                  </a:lnTo>
-                  <a:lnTo>
-                    <a:pt x="5143589" y="694730"/>
-                  </a:lnTo>
-                  <a:lnTo>
-                    <a:pt x="5143589" y="661661"/>
-                  </a:lnTo>
-                  <a:lnTo>
-                    <a:pt x="5587002" y="661661"/>
-                  </a:lnTo>
-                  <a:lnTo>
-                    <a:pt x="5587002" y="628977"/>
-                  </a:lnTo>
-                  <a:lnTo>
-                    <a:pt x="5764367" y="628977"/>
-                  </a:lnTo>
-                  <a:lnTo>
-                    <a:pt x="5764367" y="596565"/>
-                  </a:lnTo>
-                  <a:lnTo>
-                    <a:pt x="5941732" y="596565"/>
-                  </a:lnTo>
-                  <a:lnTo>
-                    <a:pt x="5941732" y="564639"/>
-                  </a:lnTo>
-                  <a:lnTo>
-                    <a:pt x="6030415" y="564639"/>
-                  </a:lnTo>
-                  <a:lnTo>
-                    <a:pt x="6030415" y="533061"/>
-                  </a:lnTo>
-                  <a:lnTo>
-                    <a:pt x="6119097" y="533061"/>
-                  </a:lnTo>
-                  <a:lnTo>
-                    <a:pt x="6119097" y="470683"/>
-                  </a:lnTo>
-                  <a:lnTo>
-                    <a:pt x="6207780" y="470683"/>
-                  </a:lnTo>
-                  <a:lnTo>
-                    <a:pt x="6207780" y="409521"/>
-                  </a:lnTo>
-                  <a:lnTo>
-                    <a:pt x="6473827" y="409521"/>
-                  </a:lnTo>
-                  <a:lnTo>
-                    <a:pt x="6473827" y="378598"/>
-                  </a:lnTo>
-                  <a:lnTo>
-                    <a:pt x="6562510" y="378598"/>
-                  </a:lnTo>
-                  <a:lnTo>
-                    <a:pt x="6562510" y="317231"/>
-                  </a:lnTo>
-                  <a:lnTo>
-                    <a:pt x="6651193" y="317231"/>
-                  </a:lnTo>
-                  <a:lnTo>
-                    <a:pt x="6651193" y="257223"/>
-                  </a:lnTo>
-                  <a:lnTo>
-                    <a:pt x="6739875" y="257223"/>
-                  </a:lnTo>
-                  <a:lnTo>
-                    <a:pt x="6739875" y="198158"/>
-                  </a:lnTo>
-                  <a:lnTo>
-                    <a:pt x="6828558" y="198158"/>
-                  </a:lnTo>
-                  <a:lnTo>
-                    <a:pt x="6828558" y="57218"/>
-                  </a:lnTo>
-                  <a:lnTo>
-                    <a:pt x="7005923" y="57218"/>
+                    <a:pt x="88682" y="2678065"/>
+                  </a:lnTo>
+                  <a:lnTo>
+                    <a:pt x="88682" y="2596991"/>
+                  </a:lnTo>
+                  <a:lnTo>
+                    <a:pt x="177365" y="2596991"/>
+                  </a:lnTo>
+                  <a:lnTo>
+                    <a:pt x="177365" y="2557200"/>
+                  </a:lnTo>
+                  <a:lnTo>
+                    <a:pt x="354730" y="2557200"/>
+                  </a:lnTo>
+                  <a:lnTo>
+                    <a:pt x="354730" y="2517497"/>
+                  </a:lnTo>
+                  <a:lnTo>
+                    <a:pt x="443412" y="2517497"/>
+                  </a:lnTo>
+                  <a:lnTo>
+                    <a:pt x="443412" y="2478258"/>
+                  </a:lnTo>
+                  <a:lnTo>
+                    <a:pt x="620778" y="2478258"/>
+                  </a:lnTo>
+                  <a:lnTo>
+                    <a:pt x="620778" y="2364030"/>
+                  </a:lnTo>
+                  <a:lnTo>
+                    <a:pt x="709460" y="2364030"/>
+                  </a:lnTo>
+                  <a:lnTo>
+                    <a:pt x="709460" y="2326052"/>
+                  </a:lnTo>
+                  <a:lnTo>
+                    <a:pt x="798143" y="2326052"/>
+                  </a:lnTo>
+                  <a:lnTo>
+                    <a:pt x="798143" y="2288245"/>
+                  </a:lnTo>
+                  <a:lnTo>
+                    <a:pt x="975508" y="2288245"/>
+                  </a:lnTo>
+                  <a:lnTo>
+                    <a:pt x="975508" y="2250622"/>
+                  </a:lnTo>
+                  <a:lnTo>
+                    <a:pt x="1152873" y="2250622"/>
+                  </a:lnTo>
+                  <a:lnTo>
+                    <a:pt x="1152873" y="2177079"/>
+                  </a:lnTo>
+                  <a:lnTo>
+                    <a:pt x="1241556" y="2177079"/>
+                  </a:lnTo>
+                  <a:lnTo>
+                    <a:pt x="1241556" y="2034333"/>
+                  </a:lnTo>
+                  <a:lnTo>
+                    <a:pt x="1330238" y="2034333"/>
+                  </a:lnTo>
+                  <a:lnTo>
+                    <a:pt x="1330238" y="1997880"/>
+                  </a:lnTo>
+                  <a:lnTo>
+                    <a:pt x="1862334" y="1997880"/>
+                  </a:lnTo>
+                  <a:lnTo>
+                    <a:pt x="1862334" y="1891679"/>
+                  </a:lnTo>
+                  <a:lnTo>
+                    <a:pt x="2039699" y="1891679"/>
+                  </a:lnTo>
+                  <a:lnTo>
+                    <a:pt x="2039699" y="1853626"/>
+                  </a:lnTo>
+                  <a:lnTo>
+                    <a:pt x="2128381" y="1853626"/>
+                  </a:lnTo>
+                  <a:lnTo>
+                    <a:pt x="2128381" y="1816210"/>
+                  </a:lnTo>
+                  <a:lnTo>
+                    <a:pt x="2217064" y="1816210"/>
+                  </a:lnTo>
+                  <a:lnTo>
+                    <a:pt x="2217064" y="1779054"/>
+                  </a:lnTo>
+                  <a:lnTo>
+                    <a:pt x="2394429" y="1779054"/>
+                  </a:lnTo>
+                  <a:lnTo>
+                    <a:pt x="2394429" y="1742154"/>
+                  </a:lnTo>
+                  <a:lnTo>
+                    <a:pt x="2483112" y="1742154"/>
+                  </a:lnTo>
+                  <a:lnTo>
+                    <a:pt x="2483112" y="1599826"/>
+                  </a:lnTo>
+                  <a:lnTo>
+                    <a:pt x="3103890" y="1599826"/>
+                  </a:lnTo>
+                  <a:lnTo>
+                    <a:pt x="3103890" y="1334613"/>
+                  </a:lnTo>
+                  <a:lnTo>
+                    <a:pt x="3192572" y="1334613"/>
+                  </a:lnTo>
+                  <a:lnTo>
+                    <a:pt x="3192572" y="1269466"/>
+                  </a:lnTo>
+                  <a:lnTo>
+                    <a:pt x="3281255" y="1269466"/>
+                  </a:lnTo>
+                  <a:lnTo>
+                    <a:pt x="3281255" y="1236398"/>
+                  </a:lnTo>
+                  <a:lnTo>
+                    <a:pt x="3369937" y="1236398"/>
+                  </a:lnTo>
+                  <a:lnTo>
+                    <a:pt x="3369937" y="1203674"/>
+                  </a:lnTo>
+                  <a:lnTo>
+                    <a:pt x="3458620" y="1203674"/>
+                  </a:lnTo>
+                  <a:lnTo>
+                    <a:pt x="3458620" y="1171280"/>
+                  </a:lnTo>
+                  <a:lnTo>
+                    <a:pt x="3547302" y="1171280"/>
+                  </a:lnTo>
+                  <a:lnTo>
+                    <a:pt x="3547302" y="1107386"/>
+                  </a:lnTo>
+                  <a:lnTo>
+                    <a:pt x="3724668" y="1107386"/>
+                  </a:lnTo>
+                  <a:lnTo>
+                    <a:pt x="3724668" y="1074972"/>
+                  </a:lnTo>
+                  <a:lnTo>
+                    <a:pt x="3813350" y="1074972"/>
+                  </a:lnTo>
+                  <a:lnTo>
+                    <a:pt x="3813350" y="1041352"/>
+                  </a:lnTo>
+                  <a:lnTo>
+                    <a:pt x="3990715" y="1041352"/>
+                  </a:lnTo>
+                  <a:lnTo>
+                    <a:pt x="3990715" y="940720"/>
+                  </a:lnTo>
+                  <a:lnTo>
+                    <a:pt x="4611493" y="940720"/>
+                  </a:lnTo>
+                  <a:lnTo>
+                    <a:pt x="4611493" y="907082"/>
+                  </a:lnTo>
+                  <a:lnTo>
+                    <a:pt x="4700176" y="907082"/>
+                  </a:lnTo>
+                  <a:lnTo>
+                    <a:pt x="4700176" y="840664"/>
+                  </a:lnTo>
+                  <a:lnTo>
+                    <a:pt x="4788859" y="840664"/>
+                  </a:lnTo>
+                  <a:lnTo>
+                    <a:pt x="4788859" y="807919"/>
+                  </a:lnTo>
+                  <a:lnTo>
+                    <a:pt x="4966224" y="807919"/>
+                  </a:lnTo>
+                  <a:lnTo>
+                    <a:pt x="4966224" y="706886"/>
+                  </a:lnTo>
+                  <a:lnTo>
+                    <a:pt x="5143589" y="706886"/>
+                  </a:lnTo>
+                  <a:lnTo>
+                    <a:pt x="5143589" y="673318"/>
+                  </a:lnTo>
+                  <a:lnTo>
+                    <a:pt x="5587002" y="673318"/>
+                  </a:lnTo>
+                  <a:lnTo>
+                    <a:pt x="5587002" y="640129"/>
+                  </a:lnTo>
+                  <a:lnTo>
+                    <a:pt x="5764367" y="640129"/>
+                  </a:lnTo>
+                  <a:lnTo>
+                    <a:pt x="5764367" y="607232"/>
+                  </a:lnTo>
+                  <a:lnTo>
+                    <a:pt x="5941732" y="607232"/>
+                  </a:lnTo>
+                  <a:lnTo>
+                    <a:pt x="5941732" y="574817"/>
+                  </a:lnTo>
+                  <a:lnTo>
+                    <a:pt x="6030415" y="574817"/>
+                  </a:lnTo>
+                  <a:lnTo>
+                    <a:pt x="6030415" y="542757"/>
+                  </a:lnTo>
+                  <a:lnTo>
+                    <a:pt x="6119097" y="542757"/>
+                  </a:lnTo>
+                  <a:lnTo>
+                    <a:pt x="6119097" y="479379"/>
+                  </a:lnTo>
+                  <a:lnTo>
+                    <a:pt x="6207780" y="479379"/>
+                  </a:lnTo>
+                  <a:lnTo>
+                    <a:pt x="6207780" y="417231"/>
+                  </a:lnTo>
+                  <a:lnTo>
+                    <a:pt x="6473827" y="417231"/>
+                  </a:lnTo>
+                  <a:lnTo>
+                    <a:pt x="6473827" y="385784"/>
+                  </a:lnTo>
+                  <a:lnTo>
+                    <a:pt x="6562510" y="385784"/>
+                  </a:lnTo>
+                  <a:lnTo>
+                    <a:pt x="6562510" y="323321"/>
+                  </a:lnTo>
+                  <a:lnTo>
+                    <a:pt x="6651193" y="323321"/>
+                  </a:lnTo>
+                  <a:lnTo>
+                    <a:pt x="6651193" y="262213"/>
+                  </a:lnTo>
+                  <a:lnTo>
+                    <a:pt x="6739875" y="262213"/>
+                  </a:lnTo>
+                  <a:lnTo>
+                    <a:pt x="6739875" y="202032"/>
+                  </a:lnTo>
+                  <a:lnTo>
+                    <a:pt x="6828558" y="202032"/>
+                  </a:lnTo>
+                  <a:lnTo>
+                    <a:pt x="6828558" y="58404"/>
+                  </a:lnTo>
+                  <a:lnTo>
+                    <a:pt x="7005923" y="58404"/>
                   </a:lnTo>
                   <a:lnTo>
                     <a:pt x="7005923" y="0"/>
@@ -3457,7 +3414,7 @@
         </p:sp>
         <p:sp>
           <p:nvSpPr>
-            <p:cNvPr id="20" name="tx20"/>
+            <p:cNvPr id="19" name="tx19"/>
             <p:cNvSpPr/>
             <p:nvPr/>
           </p:nvSpPr>
@@ -3503,13 +3460,13 @@
         </p:sp>
         <p:sp>
           <p:nvSpPr>
-            <p:cNvPr id="21" name="tx21"/>
+            <p:cNvPr id="20" name="tx20"/>
             <p:cNvSpPr/>
             <p:nvPr/>
           </p:nvSpPr>
           <p:spPr>
             <a:xfrm>
-              <a:off x="692708" y="4550420"/>
+              <a:off x="692708" y="4533408"/>
               <a:ext cx="155356" cy="80101"/>
             </a:xfrm>
             <a:prstGeom prst="rect">
@@ -3549,13 +3506,13 @@
         </p:sp>
         <p:sp>
           <p:nvSpPr>
-            <p:cNvPr id="22" name="tx22"/>
+            <p:cNvPr id="21" name="tx21"/>
             <p:cNvSpPr/>
             <p:nvPr/>
           </p:nvSpPr>
           <p:spPr>
             <a:xfrm>
-              <a:off x="692708" y="3560468"/>
+              <a:off x="692708" y="3526446"/>
               <a:ext cx="155356" cy="80101"/>
             </a:xfrm>
             <a:prstGeom prst="rect">
@@ -3595,53 +3552,7 @@
         </p:sp>
         <p:sp>
           <p:nvSpPr>
-            <p:cNvPr id="23" name="tx23"/>
-            <p:cNvSpPr/>
-            <p:nvPr/>
-          </p:nvSpPr>
-          <p:spPr>
-            <a:xfrm>
-              <a:off x="692708" y="2570517"/>
-              <a:ext cx="155356" cy="80101"/>
-            </a:xfrm>
-            <a:prstGeom prst="rect">
-              <a:avLst/>
-            </a:prstGeom>
-            <a:noFill/>
-          </p:spPr>
-          <p:txBody>
-            <a:bodyPr lIns="0" rIns="0" tIns="0" bIns="0" anchorCtr="1" anchor="ctr" wrap="none"/>
-            <a:lstStyle/>
-            <a:p>
-              <a:pPr algn="l" marL="0" marR="0" indent="0">
-                <a:lnSpc>
-                  <a:spcPts val="880"/>
-                </a:lnSpc>
-                <a:spcBef>
-                  <a:spcPts val="0"/>
-                </a:spcBef>
-                <a:spcAft>
-                  <a:spcPts val="0"/>
-                </a:spcAft>
-              </a:pPr>
-              <a:r>
-                <a:rPr sz="880">
-                  <a:solidFill>
-                    <a:srgbClr val="4D4D4D">
-                      <a:alpha val="100000"/>
-                    </a:srgbClr>
-                  </a:solidFill>
-                  <a:latin typeface="Helvetica"/>
-                  <a:cs typeface="Helvetica"/>
-                </a:rPr>
-                <a:t>0.6</a:t>
-              </a:r>
-            </a:p>
-          </p:txBody>
-        </p:sp>
-        <p:sp>
-          <p:nvSpPr>
-            <p:cNvPr id="24" name="tx24"/>
+            <p:cNvPr id="22" name="tx22"/>
             <p:cNvSpPr/>
             <p:nvPr/>
           </p:nvSpPr>
@@ -3687,7 +3598,7 @@
         </p:sp>
         <p:sp>
           <p:nvSpPr>
-            <p:cNvPr id="25" name="tx25"/>
+            <p:cNvPr id="23" name="tx23"/>
             <p:cNvSpPr/>
             <p:nvPr/>
           </p:nvSpPr>
@@ -3733,7 +3644,7 @@
         </p:sp>
         <p:sp>
           <p:nvSpPr>
-            <p:cNvPr id="26" name="tx26"/>
+            <p:cNvPr id="24" name="tx24"/>
             <p:cNvSpPr/>
             <p:nvPr/>
           </p:nvSpPr>
@@ -3779,7 +3690,7 @@
         </p:sp>
         <p:sp>
           <p:nvSpPr>
-            <p:cNvPr id="27" name="tx27"/>
+            <p:cNvPr id="25" name="tx25"/>
             <p:cNvSpPr/>
             <p:nvPr/>
           </p:nvSpPr>
@@ -3825,7 +3736,7 @@
         </p:sp>
         <p:sp>
           <p:nvSpPr>
-            <p:cNvPr id="28" name="tx28"/>
+            <p:cNvPr id="26" name="tx26"/>
             <p:cNvSpPr/>
             <p:nvPr/>
           </p:nvSpPr>
@@ -3871,7 +3782,7 @@
         </p:sp>
         <p:sp>
           <p:nvSpPr>
-            <p:cNvPr id="29" name="pl29"/>
+            <p:cNvPr id="27" name="pl27"/>
             <p:cNvSpPr/>
             <p:nvPr/>
           </p:nvSpPr>
@@ -3911,7 +3822,7 @@
         </p:sp>
         <p:sp>
           <p:nvSpPr>
-            <p:cNvPr id="30" name="pl30"/>
+            <p:cNvPr id="28" name="pl28"/>
             <p:cNvSpPr/>
             <p:nvPr/>
           </p:nvSpPr>
@@ -3951,7 +3862,7 @@
         </p:sp>
         <p:sp>
           <p:nvSpPr>
-            <p:cNvPr id="31" name="tx31"/>
+            <p:cNvPr id="29" name="tx29"/>
             <p:cNvSpPr/>
             <p:nvPr/>
           </p:nvSpPr>
@@ -3997,7 +3908,7 @@
         </p:sp>
         <p:sp>
           <p:nvSpPr>
-            <p:cNvPr id="32" name="tx32"/>
+            <p:cNvPr id="30" name="tx30"/>
             <p:cNvSpPr/>
             <p:nvPr/>
           </p:nvSpPr>
@@ -4043,7 +3954,7 @@
         </p:sp>
         <p:sp>
           <p:nvSpPr>
-            <p:cNvPr id="33" name="tx33"/>
+            <p:cNvPr id="31" name="tx31"/>
             <p:cNvSpPr/>
             <p:nvPr/>
           </p:nvSpPr>
@@ -4082,14 +3993,14 @@
                   <a:latin typeface="Helvetica"/>
                   <a:cs typeface="Helvetica"/>
                 </a:rPr>
-                <a:t>Discrep &gt;= +25 vs &lt;+25: subHR = 1.81 (95% CI 0.98-3.36), p = 0.059</a:t>
+                <a:t>Discrep &gt;= +25 vs &lt;+25: subHR = 1.76 (95% CI 0.94-3.30), p = 0.079</a:t>
               </a:r>
             </a:p>
           </p:txBody>
         </p:sp>
         <p:sp>
           <p:nvSpPr>
-            <p:cNvPr id="34" name="tx34"/>
+            <p:cNvPr id="32" name="tx32"/>
             <p:cNvSpPr/>
             <p:nvPr/>
           </p:nvSpPr>
